--- a/Messenger/Messenger.pptx
+++ b/Messenger/Messenger.pptx
@@ -3277,7 +3277,7 @@
                 <a:latin typeface="PingFang TC"/>
                 <a:ea typeface="PingFang TC"/>
               </a:rPr>
-              <a:t>真多 process：2 gateway + 2 pub/sub shard owner + etcd + DynamoDB Local · kill 一台照樣連號無缺無重 · 附 AWS Terraform</a:t>
+              <a:t>真多 process：2 gateway + 2 pub/sub + etcd + DynamoDB Local · kill 一台照樣連號 · 附 Terraform</a:t>
             </a:r>
           </a:p>
         </p:txBody>
@@ -23543,7 +23543,7 @@
                 <a:latin typeface="PingFang TC"/>
                 <a:ea typeface="PingFang TC"/>
               </a:rPr>
-              <a:t>•  per-chat lock 內 message_id = head + 1</a:t>
+              <a:t>•  lock 內 message_id = head+1</a:t>
             </a:r>
           </a:p>
           <a:p>
